--- a/docs/pptx/auc3/ritu-auc3-adjcif-sideeffect.pptx
+++ b/docs/pptx/auc3/ritu-auc3-adjcif-sideeffect.pptx
@@ -2271,7 +2271,7 @@
           </p:nvSpPr>
           <p:spPr>
             <a:xfrm>
-              <a:off x="972874" y="5145457"/>
+              <a:off x="972874" y="5149565"/>
               <a:ext cx="7644336" cy="0"/>
             </a:xfrm>
             <a:custGeom>
@@ -2314,7 +2314,7 @@
           </p:nvSpPr>
           <p:spPr>
             <a:xfrm>
-              <a:off x="972874" y="4275527"/>
+              <a:off x="972874" y="4287853"/>
               <a:ext cx="7644336" cy="0"/>
             </a:xfrm>
             <a:custGeom>
@@ -2357,7 +2357,7 @@
           </p:nvSpPr>
           <p:spPr>
             <a:xfrm>
-              <a:off x="972874" y="3405596"/>
+              <a:off x="972874" y="3426140"/>
               <a:ext cx="7644336" cy="0"/>
             </a:xfrm>
             <a:custGeom>
@@ -2615,7 +2615,7 @@
           </p:nvSpPr>
           <p:spPr>
             <a:xfrm>
-              <a:off x="972874" y="4710492"/>
+              <a:off x="972874" y="4718709"/>
               <a:ext cx="7644336" cy="0"/>
             </a:xfrm>
             <a:custGeom>
@@ -2658,7 +2658,7 @@
           </p:nvSpPr>
           <p:spPr>
             <a:xfrm>
-              <a:off x="972874" y="3840561"/>
+              <a:off x="972874" y="3856997"/>
               <a:ext cx="7644336" cy="0"/>
             </a:xfrm>
             <a:custGeom>
@@ -2701,7 +2701,7 @@
           </p:nvSpPr>
           <p:spPr>
             <a:xfrm>
-              <a:off x="972874" y="2970631"/>
+              <a:off x="972874" y="2995284"/>
               <a:ext cx="7644336" cy="0"/>
             </a:xfrm>
             <a:custGeom>
@@ -2873,96 +2873,96 @@
           </p:nvSpPr>
           <p:spPr>
             <a:xfrm>
-              <a:off x="1320344" y="4161958"/>
-              <a:ext cx="6949396" cy="1331997"/>
+              <a:off x="1320344" y="4156882"/>
+              <a:ext cx="6949396" cy="1337844"/>
             </a:xfrm>
             <a:custGeom>
               <a:avLst/>
               <a:pathLst>
-                <a:path w="6949396" h="1331997">
+                <a:path w="6949396" h="1337844">
                   <a:moveTo>
-                    <a:pt x="0" y="1331997"/>
+                    <a:pt x="0" y="1337844"/>
                   </a:moveTo>
                   <a:lnTo>
-                    <a:pt x="89094" y="1331997"/>
-                  </a:lnTo>
-                  <a:lnTo>
-                    <a:pt x="89094" y="1246677"/>
-                  </a:lnTo>
-                  <a:lnTo>
-                    <a:pt x="178189" y="1246677"/>
-                  </a:lnTo>
-                  <a:lnTo>
-                    <a:pt x="178189" y="1160794"/>
-                  </a:lnTo>
-                  <a:lnTo>
-                    <a:pt x="534568" y="1160794"/>
-                  </a:lnTo>
-                  <a:lnTo>
-                    <a:pt x="534568" y="1076550"/>
-                  </a:lnTo>
-                  <a:lnTo>
-                    <a:pt x="1514612" y="1076550"/>
-                  </a:lnTo>
-                  <a:lnTo>
-                    <a:pt x="1514612" y="993229"/>
-                  </a:lnTo>
-                  <a:lnTo>
-                    <a:pt x="1781896" y="993229"/>
-                  </a:lnTo>
-                  <a:lnTo>
-                    <a:pt x="1781896" y="911153"/>
-                  </a:lnTo>
-                  <a:lnTo>
-                    <a:pt x="2940129" y="911153"/>
-                  </a:lnTo>
-                  <a:lnTo>
-                    <a:pt x="2940129" y="819325"/>
-                  </a:lnTo>
-                  <a:lnTo>
-                    <a:pt x="3029224" y="819325"/>
-                  </a:lnTo>
-                  <a:lnTo>
-                    <a:pt x="3029224" y="717041"/>
-                  </a:lnTo>
-                  <a:lnTo>
-                    <a:pt x="3118319" y="717041"/>
-                  </a:lnTo>
-                  <a:lnTo>
-                    <a:pt x="3118319" y="612069"/>
-                  </a:lnTo>
-                  <a:lnTo>
-                    <a:pt x="3920172" y="612069"/>
-                  </a:lnTo>
-                  <a:lnTo>
-                    <a:pt x="3920172" y="508059"/>
-                  </a:lnTo>
-                  <a:lnTo>
-                    <a:pt x="5345689" y="508059"/>
-                  </a:lnTo>
-                  <a:lnTo>
-                    <a:pt x="5345689" y="406255"/>
-                  </a:lnTo>
-                  <a:lnTo>
-                    <a:pt x="5612974" y="406255"/>
-                  </a:lnTo>
-                  <a:lnTo>
-                    <a:pt x="5612974" y="306486"/>
-                  </a:lnTo>
-                  <a:lnTo>
-                    <a:pt x="5702069" y="306486"/>
-                  </a:lnTo>
-                  <a:lnTo>
-                    <a:pt x="5702069" y="208266"/>
-                  </a:lnTo>
-                  <a:lnTo>
-                    <a:pt x="5880258" y="208266"/>
-                  </a:lnTo>
-                  <a:lnTo>
-                    <a:pt x="5880258" y="103739"/>
-                  </a:lnTo>
-                  <a:lnTo>
-                    <a:pt x="6949396" y="103739"/>
+                    <a:pt x="89094" y="1337844"/>
+                  </a:lnTo>
+                  <a:lnTo>
+                    <a:pt x="89094" y="1253239"/>
+                  </a:lnTo>
+                  <a:lnTo>
+                    <a:pt x="178189" y="1253239"/>
+                  </a:lnTo>
+                  <a:lnTo>
+                    <a:pt x="178189" y="1167737"/>
+                  </a:lnTo>
+                  <a:lnTo>
+                    <a:pt x="534568" y="1167737"/>
+                  </a:lnTo>
+                  <a:lnTo>
+                    <a:pt x="534568" y="1083848"/>
+                  </a:lnTo>
+                  <a:lnTo>
+                    <a:pt x="1514612" y="1083848"/>
+                  </a:lnTo>
+                  <a:lnTo>
+                    <a:pt x="1514612" y="1000962"/>
+                  </a:lnTo>
+                  <a:lnTo>
+                    <a:pt x="1781896" y="1000962"/>
+                  </a:lnTo>
+                  <a:lnTo>
+                    <a:pt x="1781896" y="919306"/>
+                  </a:lnTo>
+                  <a:lnTo>
+                    <a:pt x="2940129" y="919306"/>
+                  </a:lnTo>
+                  <a:lnTo>
+                    <a:pt x="2940129" y="826488"/>
+                  </a:lnTo>
+                  <a:lnTo>
+                    <a:pt x="3029224" y="826488"/>
+                  </a:lnTo>
+                  <a:lnTo>
+                    <a:pt x="3029224" y="723407"/>
+                  </a:lnTo>
+                  <a:lnTo>
+                    <a:pt x="3118319" y="723407"/>
+                  </a:lnTo>
+                  <a:lnTo>
+                    <a:pt x="3118319" y="617166"/>
+                  </a:lnTo>
+                  <a:lnTo>
+                    <a:pt x="3920172" y="617166"/>
+                  </a:lnTo>
+                  <a:lnTo>
+                    <a:pt x="3920172" y="511993"/>
+                  </a:lnTo>
+                  <a:lnTo>
+                    <a:pt x="5345689" y="511993"/>
+                  </a:lnTo>
+                  <a:lnTo>
+                    <a:pt x="5345689" y="409107"/>
+                  </a:lnTo>
+                  <a:lnTo>
+                    <a:pt x="5612974" y="409107"/>
+                  </a:lnTo>
+                  <a:lnTo>
+                    <a:pt x="5612974" y="308359"/>
+                  </a:lnTo>
+                  <a:lnTo>
+                    <a:pt x="5702069" y="308359"/>
+                  </a:lnTo>
+                  <a:lnTo>
+                    <a:pt x="5702069" y="209273"/>
+                  </a:lnTo>
+                  <a:lnTo>
+                    <a:pt x="5880258" y="209273"/>
+                  </a:lnTo>
+                  <a:lnTo>
+                    <a:pt x="5880258" y="104126"/>
+                  </a:lnTo>
+                  <a:lnTo>
+                    <a:pt x="6949396" y="104126"/>
                   </a:lnTo>
                   <a:lnTo>
                     <a:pt x="6949396" y="0"/>
@@ -2995,95 +2995,95 @@
           <p:spPr>
             <a:xfrm>
               <a:off x="1320344" y="2861938"/>
-              <a:ext cx="6949396" cy="2528666"/>
+              <a:ext cx="6949396" cy="2530575"/>
             </a:xfrm>
             <a:custGeom>
               <a:avLst/>
               <a:pathLst>
-                <a:path w="6949396" h="2528666">
+                <a:path w="6949396" h="2530575">
                   <a:moveTo>
-                    <a:pt x="0" y="2528666"/>
+                    <a:pt x="0" y="2530575"/>
                   </a:moveTo>
                   <a:lnTo>
-                    <a:pt x="89094" y="2528666"/>
-                  </a:lnTo>
-                  <a:lnTo>
-                    <a:pt x="89094" y="2346518"/>
-                  </a:lnTo>
-                  <a:lnTo>
-                    <a:pt x="178189" y="2346518"/>
-                  </a:lnTo>
-                  <a:lnTo>
-                    <a:pt x="178189" y="2167653"/>
-                  </a:lnTo>
-                  <a:lnTo>
-                    <a:pt x="534568" y="2167653"/>
-                  </a:lnTo>
-                  <a:lnTo>
-                    <a:pt x="534568" y="1996002"/>
-                  </a:lnTo>
-                  <a:lnTo>
-                    <a:pt x="1514612" y="1996002"/>
-                  </a:lnTo>
-                  <a:lnTo>
-                    <a:pt x="1514612" y="1829467"/>
-                  </a:lnTo>
-                  <a:lnTo>
-                    <a:pt x="1781896" y="1829467"/>
-                  </a:lnTo>
-                  <a:lnTo>
-                    <a:pt x="1781896" y="1668177"/>
-                  </a:lnTo>
-                  <a:lnTo>
-                    <a:pt x="2940129" y="1668177"/>
-                  </a:lnTo>
-                  <a:lnTo>
-                    <a:pt x="2940129" y="1490586"/>
-                  </a:lnTo>
-                  <a:lnTo>
-                    <a:pt x="3029224" y="1490586"/>
-                  </a:lnTo>
-                  <a:lnTo>
-                    <a:pt x="3029224" y="1295905"/>
-                  </a:lnTo>
-                  <a:lnTo>
-                    <a:pt x="3118319" y="1295905"/>
-                  </a:lnTo>
-                  <a:lnTo>
-                    <a:pt x="3118319" y="1099136"/>
-                  </a:lnTo>
-                  <a:lnTo>
-                    <a:pt x="3920172" y="1099136"/>
-                  </a:lnTo>
-                  <a:lnTo>
-                    <a:pt x="3920172" y="906870"/>
-                  </a:lnTo>
-                  <a:lnTo>
-                    <a:pt x="5345689" y="906870"/>
-                  </a:lnTo>
-                  <a:lnTo>
-                    <a:pt x="5345689" y="721051"/>
-                  </a:lnTo>
-                  <a:lnTo>
-                    <a:pt x="5612974" y="721051"/>
-                  </a:lnTo>
-                  <a:lnTo>
-                    <a:pt x="5612974" y="541045"/>
-                  </a:lnTo>
-                  <a:lnTo>
-                    <a:pt x="5702069" y="541045"/>
-                  </a:lnTo>
-                  <a:lnTo>
-                    <a:pt x="5702069" y="365753"/>
-                  </a:lnTo>
-                  <a:lnTo>
-                    <a:pt x="5880258" y="365753"/>
-                  </a:lnTo>
-                  <a:lnTo>
-                    <a:pt x="5880258" y="181199"/>
-                  </a:lnTo>
-                  <a:lnTo>
-                    <a:pt x="6949396" y="181199"/>
+                    <a:pt x="89094" y="2530575"/>
+                  </a:lnTo>
+                  <a:lnTo>
+                    <a:pt x="89094" y="2350158"/>
+                  </a:lnTo>
+                  <a:lnTo>
+                    <a:pt x="178189" y="2350158"/>
+                  </a:lnTo>
+                  <a:lnTo>
+                    <a:pt x="178189" y="2172322"/>
+                  </a:lnTo>
+                  <a:lnTo>
+                    <a:pt x="534568" y="2172322"/>
+                  </a:lnTo>
+                  <a:lnTo>
+                    <a:pt x="534568" y="2001679"/>
+                  </a:lnTo>
+                  <a:lnTo>
+                    <a:pt x="1514612" y="2001679"/>
+                  </a:lnTo>
+                  <a:lnTo>
+                    <a:pt x="1514612" y="1836347"/>
+                  </a:lnTo>
+                  <a:lnTo>
+                    <a:pt x="1781896" y="1836347"/>
+                  </a:lnTo>
+                  <a:lnTo>
+                    <a:pt x="1781896" y="1676267"/>
+                  </a:lnTo>
+                  <a:lnTo>
+                    <a:pt x="2940129" y="1676267"/>
+                  </a:lnTo>
+                  <a:lnTo>
+                    <a:pt x="2940129" y="1497277"/>
+                  </a:lnTo>
+                  <a:lnTo>
+                    <a:pt x="3029224" y="1497277"/>
+                  </a:lnTo>
+                  <a:lnTo>
+                    <a:pt x="3029224" y="1301749"/>
+                  </a:lnTo>
+                  <a:lnTo>
+                    <a:pt x="3118319" y="1301749"/>
+                  </a:lnTo>
+                  <a:lnTo>
+                    <a:pt x="3118319" y="1103378"/>
+                  </a:lnTo>
+                  <a:lnTo>
+                    <a:pt x="3920172" y="1103378"/>
+                  </a:lnTo>
+                  <a:lnTo>
+                    <a:pt x="3920172" y="909791"/>
+                  </a:lnTo>
+                  <a:lnTo>
+                    <a:pt x="5345689" y="909791"/>
+                  </a:lnTo>
+                  <a:lnTo>
+                    <a:pt x="5345689" y="722833"/>
+                  </a:lnTo>
+                  <a:lnTo>
+                    <a:pt x="5612974" y="722833"/>
+                  </a:lnTo>
+                  <a:lnTo>
+                    <a:pt x="5612974" y="541896"/>
+                  </a:lnTo>
+                  <a:lnTo>
+                    <a:pt x="5702069" y="541896"/>
+                  </a:lnTo>
+                  <a:lnTo>
+                    <a:pt x="5702069" y="365873"/>
+                  </a:lnTo>
+                  <a:lnTo>
+                    <a:pt x="5880258" y="365873"/>
+                  </a:lnTo>
+                  <a:lnTo>
+                    <a:pt x="5880258" y="181068"/>
+                  </a:lnTo>
+                  <a:lnTo>
+                    <a:pt x="6949396" y="181068"/>
                   </a:lnTo>
                   <a:lnTo>
                     <a:pt x="6949396" y="0"/>
@@ -3161,7 +3161,7 @@
           </p:nvSpPr>
           <p:spPr>
             <a:xfrm>
-              <a:off x="692708" y="4670441"/>
+              <a:off x="692708" y="4678658"/>
               <a:ext cx="217535" cy="80101"/>
             </a:xfrm>
             <a:prstGeom prst="rect">
@@ -3207,7 +3207,7 @@
           </p:nvSpPr>
           <p:spPr>
             <a:xfrm>
-              <a:off x="692708" y="3800511"/>
+              <a:off x="692708" y="3816946"/>
               <a:ext cx="217535" cy="80101"/>
             </a:xfrm>
             <a:prstGeom prst="rect">
@@ -3253,7 +3253,7 @@
           </p:nvSpPr>
           <p:spPr>
             <a:xfrm>
-              <a:off x="692708" y="2930581"/>
+              <a:off x="692708" y="2955233"/>
               <a:ext cx="217535" cy="80101"/>
             </a:xfrm>
             <a:prstGeom prst="rect">
@@ -3734,7 +3734,7 @@
                   <a:latin typeface="Helvetica"/>
                   <a:cs typeface="Helvetica"/>
                 </a:rPr>
-                <a:t>Discrep &gt;= +25 vs &lt;+25: subHR = 2.23 (95% CI 0.39-12.76), p = 0.368</a:t>
+                <a:t>Discrep &gt;= +25 vs &lt;+25: subHR = 2.23 (95% CI 0.40-12.43), p = 0.362</a:t>
               </a:r>
             </a:p>
           </p:txBody>
